--- a/Object detection_YOLO.pptx
+++ b/Object detection_YOLO.pptx
@@ -21,10 +21,10 @@
     <p:sldId id="1127" r:id="rId9"/>
     <p:sldId id="1121" r:id="rId10"/>
     <p:sldId id="1133" r:id="rId11"/>
-    <p:sldId id="1132" r:id="rId12"/>
-    <p:sldId id="1122" r:id="rId13"/>
-    <p:sldId id="1135" r:id="rId14"/>
-    <p:sldId id="1136" r:id="rId15"/>
+    <p:sldId id="1135" r:id="rId12"/>
+    <p:sldId id="1136" r:id="rId13"/>
+    <p:sldId id="1132" r:id="rId14"/>
+    <p:sldId id="1122" r:id="rId15"/>
     <p:sldId id="1134" r:id="rId16"/>
     <p:sldId id="1123" r:id="rId17"/>
   </p:sldIdLst>
@@ -147,10 +147,10 @@
             <p14:sldId id="1127"/>
             <p14:sldId id="1121"/>
             <p14:sldId id="1133"/>
+            <p14:sldId id="1135"/>
+            <p14:sldId id="1136"/>
             <p14:sldId id="1132"/>
             <p14:sldId id="1122"/>
-            <p14:sldId id="1135"/>
-            <p14:sldId id="1136"/>
             <p14:sldId id="1134"/>
             <p14:sldId id="1123"/>
           </p14:sldIdLst>
@@ -4799,472 +4799,6 @@
         <p:cNvPr id="1" name="">
           <a:extLst>
             <a:ext uri="{FF2B5EF4-FFF2-40B4-BE49-F238E27FC236}">
-              <a16:creationId xmlns:a16="http://schemas.microsoft.com/office/drawing/2014/main" id="{8D67D301-B114-F827-4260-924D7C208916}"/>
-            </a:ext>
-          </a:extLst>
-        </p:cNvPr>
-        <p:cNvGrpSpPr/>
-        <p:nvPr/>
-      </p:nvGrpSpPr>
-      <p:grpSpPr>
-        <a:xfrm>
-          <a:off x="0" y="0"/>
-          <a:ext cx="0" cy="0"/>
-          <a:chOff x="0" y="0"/>
-          <a:chExt cx="0" cy="0"/>
-        </a:xfrm>
-      </p:grpSpPr>
-      <p:sp>
-        <p:nvSpPr>
-          <p:cNvPr id="4" name="슬라이드 번호 개체 틀 3">
-            <a:extLst>
-              <a:ext uri="{FF2B5EF4-FFF2-40B4-BE49-F238E27FC236}">
-                <a16:creationId xmlns:a16="http://schemas.microsoft.com/office/drawing/2014/main" id="{445FA5C7-898C-1C68-7E74-AD6760E3C3F3}"/>
-              </a:ext>
-            </a:extLst>
-          </p:cNvPr>
-          <p:cNvSpPr>
-            <a:spLocks noGrp="1"/>
-          </p:cNvSpPr>
-          <p:nvPr>
-            <p:ph type="sldNum" sz="quarter" idx="12"/>
-          </p:nvPr>
-        </p:nvSpPr>
-        <p:spPr>
-          <a:xfrm>
-            <a:off x="10514011" y="6036261"/>
-            <a:ext cx="753545" cy="365125"/>
-          </a:xfrm>
-        </p:spPr>
-        <p:txBody>
-          <a:bodyPr/>
-          <a:lstStyle/>
-          <a:p>
-            <a:fld id="{D57F1E4F-1CFF-5643-939E-217C01CDF565}" type="slidenum">
-              <a:rPr lang="en-US" smtClean="0"/>
-              <a:pPr/>
-              <a:t>11</a:t>
-            </a:fld>
-            <a:endParaRPr lang="en-US" dirty="0"/>
-          </a:p>
-        </p:txBody>
-      </p:sp>
-      <p:sp>
-        <p:nvSpPr>
-          <p:cNvPr id="3" name="제목 1">
-            <a:extLst>
-              <a:ext uri="{FF2B5EF4-FFF2-40B4-BE49-F238E27FC236}">
-                <a16:creationId xmlns:a16="http://schemas.microsoft.com/office/drawing/2014/main" id="{1D8A7BF3-1C90-CC60-888E-27948DFAF53C}"/>
-              </a:ext>
-            </a:extLst>
-          </p:cNvPr>
-          <p:cNvSpPr txBox="1">
-            <a:spLocks/>
-          </p:cNvSpPr>
-          <p:nvPr/>
-        </p:nvSpPr>
-        <p:spPr>
-          <a:xfrm>
-            <a:off x="475645" y="481983"/>
-            <a:ext cx="10353762" cy="766439"/>
-          </a:xfrm>
-          <a:prstGeom prst="rect">
-            <a:avLst/>
-          </a:prstGeom>
-        </p:spPr>
-        <p:txBody>
-          <a:bodyPr vert="horz" lIns="91440" tIns="45720" rIns="91440" bIns="45720" rtlCol="0" anchor="ctr">
-            <a:normAutofit/>
-          </a:bodyPr>
-          <a:lstStyle>
-            <a:lvl1pPr algn="ctr" defTabSz="914400" rtl="0" eaLnBrk="1" latinLnBrk="1" hangingPunct="1">
-              <a:lnSpc>
-                <a:spcPct val="90000"/>
-              </a:lnSpc>
-              <a:spcBef>
-                <a:spcPct val="0"/>
-              </a:spcBef>
-              <a:buNone/>
-              <a:defRPr sz="3200" kern="1200" cap="all" baseline="0">
-                <a:solidFill>
-                  <a:schemeClr val="tx1"/>
-                </a:solidFill>
-                <a:effectLst/>
-                <a:latin typeface="Batang" panose="02030600000101010101" pitchFamily="18" charset="-127"/>
-                <a:ea typeface="Batang" panose="02030600000101010101" pitchFamily="18" charset="-127"/>
-                <a:cs typeface="+mj-cs"/>
-              </a:defRPr>
-            </a:lvl1pPr>
-          </a:lstStyle>
-          <a:p>
-            <a:pPr algn="l"/>
-            <a:r>
-              <a:rPr lang="en-US" altLang="ko-KR" sz="2800" cap="none" dirty="0">
-                <a:latin typeface="D2Coding" panose="020B0609020101020101" pitchFamily="49" charset="-127"/>
-                <a:ea typeface="D2Coding" panose="020B0609020101020101" pitchFamily="49" charset="-127"/>
-                <a:cs typeface="Segoe UI Light" panose="020B0502040204020203" pitchFamily="34" charset="0"/>
-              </a:rPr>
-              <a:t>YOLO</a:t>
-            </a:r>
-            <a:endParaRPr lang="ko-KR" altLang="en-US" sz="2800" cap="none" dirty="0">
-              <a:latin typeface="D2Coding" panose="020B0609020101020101" pitchFamily="49" charset="-127"/>
-              <a:ea typeface="D2Coding" panose="020B0609020101020101" pitchFamily="49" charset="-127"/>
-              <a:cs typeface="Segoe UI Light" panose="020B0502040204020203" pitchFamily="34" charset="0"/>
-            </a:endParaRPr>
-          </a:p>
-        </p:txBody>
-      </p:sp>
-      <p:pic>
-        <p:nvPicPr>
-          <p:cNvPr id="7" name="Picture 2">
-            <a:extLst>
-              <a:ext uri="{FF2B5EF4-FFF2-40B4-BE49-F238E27FC236}">
-                <a16:creationId xmlns:a16="http://schemas.microsoft.com/office/drawing/2014/main" id="{991A9F3B-8F15-60CA-FF37-066CA17F4ACD}"/>
-              </a:ext>
-            </a:extLst>
-          </p:cNvPr>
-          <p:cNvPicPr>
-            <a:picLocks noChangeAspect="1" noChangeArrowheads="1"/>
-          </p:cNvPicPr>
-          <p:nvPr/>
-        </p:nvPicPr>
-        <p:blipFill>
-          <a:blip r:embed="rId2">
-            <a:extLst>
-              <a:ext uri="{28A0092B-C50C-407E-A947-70E740481C1C}">
-                <a14:useLocalDpi xmlns:a14="http://schemas.microsoft.com/office/drawing/2010/main" val="0"/>
-              </a:ext>
-            </a:extLst>
-          </a:blip>
-          <a:srcRect/>
-          <a:stretch>
-            <a:fillRect/>
-          </a:stretch>
-        </p:blipFill>
-        <p:spPr bwMode="auto">
-          <a:xfrm>
-            <a:off x="1728040" y="2178311"/>
-            <a:ext cx="8244635" cy="4126339"/>
-          </a:xfrm>
-          <a:prstGeom prst="rect">
-            <a:avLst/>
-          </a:prstGeom>
-          <a:noFill/>
-          <a:extLst>
-            <a:ext uri="{909E8E84-426E-40DD-AFC4-6F175D3DCCD1}">
-              <a14:hiddenFill xmlns:a14="http://schemas.microsoft.com/office/drawing/2010/main">
-                <a:solidFill>
-                  <a:srgbClr val="FFFFFF"/>
-                </a:solidFill>
-              </a14:hiddenFill>
-            </a:ext>
-          </a:extLst>
-        </p:spPr>
-      </p:pic>
-      <p:sp>
-        <p:nvSpPr>
-          <p:cNvPr id="8" name="TextBox 7">
-            <a:extLst>
-              <a:ext uri="{FF2B5EF4-FFF2-40B4-BE49-F238E27FC236}">
-                <a16:creationId xmlns:a16="http://schemas.microsoft.com/office/drawing/2014/main" id="{F07ADC64-4751-52A0-DDEB-20843A556B71}"/>
-              </a:ext>
-            </a:extLst>
-          </p:cNvPr>
-          <p:cNvSpPr txBox="1"/>
-          <p:nvPr/>
-        </p:nvSpPr>
-        <p:spPr>
-          <a:xfrm>
-            <a:off x="623140" y="1424888"/>
-            <a:ext cx="11159285" cy="369332"/>
-          </a:xfrm>
-          <a:prstGeom prst="rect">
-            <a:avLst/>
-          </a:prstGeom>
-          <a:noFill/>
-        </p:spPr>
-        <p:txBody>
-          <a:bodyPr wrap="square" rtlCol="0">
-            <a:spAutoFit/>
-          </a:bodyPr>
-          <a:lstStyle/>
-          <a:p>
-            <a:r>
-              <a:rPr lang="ko-KR" altLang="en-US" dirty="0">
-                <a:latin typeface="D2Coding" panose="020B0609020101020101" pitchFamily="49" charset="-127"/>
-                <a:ea typeface="D2Coding" panose="020B0609020101020101" pitchFamily="49" charset="-127"/>
-              </a:rPr>
-              <a:t>컴퓨터가 </a:t>
-            </a:r>
-            <a:r>
-              <a:rPr lang="en-US" altLang="ko-KR" dirty="0">
-                <a:latin typeface="D2Coding" panose="020B0609020101020101" pitchFamily="49" charset="-127"/>
-                <a:ea typeface="D2Coding" panose="020B0609020101020101" pitchFamily="49" charset="-127"/>
-              </a:rPr>
-              <a:t>Image</a:t>
-            </a:r>
-            <a:r>
-              <a:rPr lang="ko-KR" altLang="en-US" dirty="0">
-                <a:latin typeface="D2Coding" panose="020B0609020101020101" pitchFamily="49" charset="-127"/>
-                <a:ea typeface="D2Coding" panose="020B0609020101020101" pitchFamily="49" charset="-127"/>
-              </a:rPr>
-              <a:t>의 물체를 감지하고 분류 예측</a:t>
-            </a:r>
-            <a:r>
-              <a:rPr lang="en-US" altLang="ko-KR" dirty="0">
-                <a:latin typeface="D2Coding" panose="020B0609020101020101" pitchFamily="49" charset="-127"/>
-                <a:ea typeface="D2Coding" panose="020B0609020101020101" pitchFamily="49" charset="-127"/>
-              </a:rPr>
-              <a:t>(Object Detection)</a:t>
-            </a:r>
-            <a:r>
-              <a:rPr lang="ko-KR" altLang="en-US" dirty="0">
-                <a:latin typeface="D2Coding" panose="020B0609020101020101" pitchFamily="49" charset="-127"/>
-                <a:ea typeface="D2Coding" panose="020B0609020101020101" pitchFamily="49" charset="-127"/>
-              </a:rPr>
-              <a:t> </a:t>
-            </a:r>
-            <a:r>
-              <a:rPr lang="en-US" altLang="ko-KR" dirty="0">
-                <a:latin typeface="D2Coding" panose="020B0609020101020101" pitchFamily="49" charset="-127"/>
-                <a:ea typeface="D2Coding" panose="020B0609020101020101" pitchFamily="49" charset="-127"/>
-              </a:rPr>
-              <a:t>: </a:t>
-            </a:r>
-            <a:r>
-              <a:rPr lang="en-US" altLang="ko-KR" dirty="0">
-                <a:latin typeface="D2Coding" panose="020B0609020101020101" pitchFamily="49" charset="-127"/>
-                <a:ea typeface="D2Coding" panose="020B0609020101020101" pitchFamily="49" charset="-127"/>
-                <a:hlinkClick r:id="rId3"/>
-              </a:rPr>
-              <a:t>https://roboflow.com/</a:t>
-            </a:r>
-            <a:r>
-              <a:rPr lang="en-US" altLang="ko-KR" dirty="0">
-                <a:latin typeface="D2Coding" panose="020B0609020101020101" pitchFamily="49" charset="-127"/>
-                <a:ea typeface="D2Coding" panose="020B0609020101020101" pitchFamily="49" charset="-127"/>
-              </a:rPr>
-              <a:t> </a:t>
-            </a:r>
-            <a:r>
-              <a:rPr lang="ko-KR" altLang="en-US" dirty="0">
-                <a:latin typeface="D2Coding" panose="020B0609020101020101" pitchFamily="49" charset="-127"/>
-                <a:ea typeface="D2Coding" panose="020B0609020101020101" pitchFamily="49" charset="-127"/>
-              </a:rPr>
-              <a:t> </a:t>
-            </a:r>
-            <a:endParaRPr lang="ko-KR" altLang="en-US" dirty="0">
-              <a:solidFill>
-                <a:srgbClr val="0070C0"/>
-              </a:solidFill>
-              <a:latin typeface="D2Coding" panose="020B0609020101020101" pitchFamily="49" charset="-127"/>
-              <a:ea typeface="D2Coding" panose="020B0609020101020101" pitchFamily="49" charset="-127"/>
-            </a:endParaRPr>
-          </a:p>
-        </p:txBody>
-      </p:sp>
-    </p:spTree>
-    <p:extLst>
-      <p:ext uri="{BB962C8B-B14F-4D97-AF65-F5344CB8AC3E}">
-        <p14:creationId xmlns:p14="http://schemas.microsoft.com/office/powerpoint/2010/main" val="1798292069"/>
-      </p:ext>
-    </p:extLst>
-  </p:cSld>
-  <p:clrMapOvr>
-    <a:masterClrMapping/>
-  </p:clrMapOvr>
-</p:sld>
-</file>
-
-<file path=ppt/slides/slide12.xml><?xml version="1.0" encoding="utf-8"?>
-<p:sld xmlns:a="http://schemas.openxmlformats.org/drawingml/2006/main" xmlns:r="http://schemas.openxmlformats.org/officeDocument/2006/relationships" xmlns:p="http://schemas.openxmlformats.org/presentationml/2006/main">
-  <p:cSld>
-    <p:spTree>
-      <p:nvGrpSpPr>
-        <p:cNvPr id="1" name="">
-          <a:extLst>
-            <a:ext uri="{FF2B5EF4-FFF2-40B4-BE49-F238E27FC236}">
-              <a16:creationId xmlns:a16="http://schemas.microsoft.com/office/drawing/2014/main" id="{8FB326FB-150E-BE96-08E2-079622462002}"/>
-            </a:ext>
-          </a:extLst>
-        </p:cNvPr>
-        <p:cNvGrpSpPr/>
-        <p:nvPr/>
-      </p:nvGrpSpPr>
-      <p:grpSpPr>
-        <a:xfrm>
-          <a:off x="0" y="0"/>
-          <a:ext cx="0" cy="0"/>
-          <a:chOff x="0" y="0"/>
-          <a:chExt cx="0" cy="0"/>
-        </a:xfrm>
-      </p:grpSpPr>
-      <p:sp>
-        <p:nvSpPr>
-          <p:cNvPr id="4" name="슬라이드 번호 개체 틀 3">
-            <a:extLst>
-              <a:ext uri="{FF2B5EF4-FFF2-40B4-BE49-F238E27FC236}">
-                <a16:creationId xmlns:a16="http://schemas.microsoft.com/office/drawing/2014/main" id="{AF74812A-4AB7-6AC8-E8CF-FBA1128EF365}"/>
-              </a:ext>
-            </a:extLst>
-          </p:cNvPr>
-          <p:cNvSpPr>
-            <a:spLocks noGrp="1"/>
-          </p:cNvSpPr>
-          <p:nvPr>
-            <p:ph type="sldNum" sz="quarter" idx="12"/>
-          </p:nvPr>
-        </p:nvSpPr>
-        <p:spPr>
-          <a:xfrm>
-            <a:off x="10514011" y="6036261"/>
-            <a:ext cx="753545" cy="365125"/>
-          </a:xfrm>
-        </p:spPr>
-        <p:txBody>
-          <a:bodyPr/>
-          <a:lstStyle/>
-          <a:p>
-            <a:fld id="{D57F1E4F-1CFF-5643-939E-217C01CDF565}" type="slidenum">
-              <a:rPr lang="en-US" smtClean="0"/>
-              <a:pPr/>
-              <a:t>12</a:t>
-            </a:fld>
-            <a:endParaRPr lang="en-US" dirty="0"/>
-          </a:p>
-        </p:txBody>
-      </p:sp>
-      <p:sp>
-        <p:nvSpPr>
-          <p:cNvPr id="3" name="제목 1">
-            <a:extLst>
-              <a:ext uri="{FF2B5EF4-FFF2-40B4-BE49-F238E27FC236}">
-                <a16:creationId xmlns:a16="http://schemas.microsoft.com/office/drawing/2014/main" id="{FCBB2FC7-ABBB-6EF3-A901-A983D707DAD0}"/>
-              </a:ext>
-            </a:extLst>
-          </p:cNvPr>
-          <p:cNvSpPr txBox="1">
-            <a:spLocks/>
-          </p:cNvSpPr>
-          <p:nvPr/>
-        </p:nvSpPr>
-        <p:spPr>
-          <a:xfrm>
-            <a:off x="475645" y="481983"/>
-            <a:ext cx="10353762" cy="766439"/>
-          </a:xfrm>
-          <a:prstGeom prst="rect">
-            <a:avLst/>
-          </a:prstGeom>
-        </p:spPr>
-        <p:txBody>
-          <a:bodyPr vert="horz" lIns="91440" tIns="45720" rIns="91440" bIns="45720" rtlCol="0" anchor="ctr">
-            <a:normAutofit/>
-          </a:bodyPr>
-          <a:lstStyle>
-            <a:lvl1pPr algn="ctr" defTabSz="914400" rtl="0" eaLnBrk="1" latinLnBrk="1" hangingPunct="1">
-              <a:lnSpc>
-                <a:spcPct val="90000"/>
-              </a:lnSpc>
-              <a:spcBef>
-                <a:spcPct val="0"/>
-              </a:spcBef>
-              <a:buNone/>
-              <a:defRPr sz="3200" kern="1200" cap="all" baseline="0">
-                <a:solidFill>
-                  <a:schemeClr val="tx1"/>
-                </a:solidFill>
-                <a:effectLst/>
-                <a:latin typeface="Batang" panose="02030600000101010101" pitchFamily="18" charset="-127"/>
-                <a:ea typeface="Batang" panose="02030600000101010101" pitchFamily="18" charset="-127"/>
-                <a:cs typeface="+mj-cs"/>
-              </a:defRPr>
-            </a:lvl1pPr>
-          </a:lstStyle>
-          <a:p>
-            <a:pPr algn="l"/>
-            <a:r>
-              <a:rPr lang="en-US" altLang="ko-KR" sz="2800" cap="none" dirty="0">
-                <a:latin typeface="D2Coding" panose="020B0609020101020101" pitchFamily="49" charset="-127"/>
-                <a:ea typeface="D2Coding" panose="020B0609020101020101" pitchFamily="49" charset="-127"/>
-                <a:cs typeface="Segoe UI Light" panose="020B0502040204020203" pitchFamily="34" charset="0"/>
-              </a:rPr>
-              <a:t>YOLO: </a:t>
-            </a:r>
-            <a:r>
-              <a:rPr lang="en-US" altLang="ko-KR" sz="2800" cap="none" dirty="0">
-                <a:latin typeface="D2Coding" panose="020B0609020101020101" pitchFamily="49" charset="-127"/>
-                <a:ea typeface="D2Coding" panose="020B0609020101020101" pitchFamily="49" charset="-127"/>
-                <a:cs typeface="Segoe UI Light" panose="020B0502040204020203" pitchFamily="34" charset="0"/>
-                <a:hlinkClick r:id="rId2">
-                  <a:extLst>
-                    <a:ext uri="{A12FA001-AC4F-418D-AE19-62706E023703}">
-                      <ahyp:hlinkClr xmlns:ahyp="http://schemas.microsoft.com/office/drawing/2018/hyperlinkcolor" val="tx"/>
-                    </a:ext>
-                  </a:extLst>
-                </a:hlinkClick>
-              </a:rPr>
-              <a:t>YOLO Object Detection</a:t>
-            </a:r>
-            <a:endParaRPr lang="ko-KR" altLang="en-US" sz="2800" cap="none" dirty="0">
-              <a:latin typeface="D2Coding" panose="020B0609020101020101" pitchFamily="49" charset="-127"/>
-              <a:ea typeface="D2Coding" panose="020B0609020101020101" pitchFamily="49" charset="-127"/>
-              <a:cs typeface="Segoe UI Light" panose="020B0502040204020203" pitchFamily="34" charset="0"/>
-            </a:endParaRPr>
-          </a:p>
-        </p:txBody>
-      </p:sp>
-      <p:pic>
-        <p:nvPicPr>
-          <p:cNvPr id="17" name="그림 16">
-            <a:extLst>
-              <a:ext uri="{FF2B5EF4-FFF2-40B4-BE49-F238E27FC236}">
-                <a16:creationId xmlns:a16="http://schemas.microsoft.com/office/drawing/2014/main" id="{AE399E9D-0E06-6644-28CE-43E6B82352B6}"/>
-              </a:ext>
-            </a:extLst>
-          </p:cNvPr>
-          <p:cNvPicPr>
-            <a:picLocks noChangeAspect="1"/>
-          </p:cNvPicPr>
-          <p:nvPr/>
-        </p:nvPicPr>
-        <p:blipFill>
-          <a:blip r:embed="rId3"/>
-          <a:stretch>
-            <a:fillRect/>
-          </a:stretch>
-        </p:blipFill>
-        <p:spPr>
-          <a:xfrm>
-            <a:off x="1268356" y="1685745"/>
-            <a:ext cx="9600234" cy="4562655"/>
-          </a:xfrm>
-          <a:prstGeom prst="rect">
-            <a:avLst/>
-          </a:prstGeom>
-        </p:spPr>
-      </p:pic>
-    </p:spTree>
-    <p:extLst>
-      <p:ext uri="{BB962C8B-B14F-4D97-AF65-F5344CB8AC3E}">
-        <p14:creationId xmlns:p14="http://schemas.microsoft.com/office/powerpoint/2010/main" val="1478085054"/>
-      </p:ext>
-    </p:extLst>
-  </p:cSld>
-  <p:clrMapOvr>
-    <a:masterClrMapping/>
-  </p:clrMapOvr>
-</p:sld>
-</file>
-
-<file path=ppt/slides/slide13.xml><?xml version="1.0" encoding="utf-8"?>
-<p:sld xmlns:a="http://schemas.openxmlformats.org/drawingml/2006/main" xmlns:r="http://schemas.openxmlformats.org/officeDocument/2006/relationships" xmlns:p="http://schemas.openxmlformats.org/presentationml/2006/main">
-  <p:cSld>
-    <p:spTree>
-      <p:nvGrpSpPr>
-        <p:cNvPr id="1" name="">
-          <a:extLst>
-            <a:ext uri="{FF2B5EF4-FFF2-40B4-BE49-F238E27FC236}">
               <a16:creationId xmlns:a16="http://schemas.microsoft.com/office/drawing/2014/main" id="{C90A392C-D73D-D148-7BEB-416C2B757A2B}"/>
             </a:ext>
           </a:extLst>
@@ -5309,7 +4843,7 @@
             <a:fld id="{D57F1E4F-1CFF-5643-939E-217C01CDF565}" type="slidenum">
               <a:rPr lang="en-US" smtClean="0"/>
               <a:pPr/>
-              <a:t>13</a:t>
+              <a:t>11</a:t>
             </a:fld>
             <a:endParaRPr lang="en-US" dirty="0"/>
           </a:p>
@@ -6216,7 +5750,7 @@
 </p:sld>
 </file>
 
-<file path=ppt/slides/slide14.xml><?xml version="1.0" encoding="utf-8"?>
+<file path=ppt/slides/slide12.xml><?xml version="1.0" encoding="utf-8"?>
 <p:sld xmlns:a="http://schemas.openxmlformats.org/drawingml/2006/main" xmlns:r="http://schemas.openxmlformats.org/officeDocument/2006/relationships" xmlns:p="http://schemas.openxmlformats.org/presentationml/2006/main">
   <p:cSld>
     <p:spTree>
@@ -6359,7 +5893,7 @@
             <a:fld id="{D57F1E4F-1CFF-5643-939E-217C01CDF565}" type="slidenum">
               <a:rPr lang="en-US" smtClean="0"/>
               <a:pPr/>
-              <a:t>14</a:t>
+              <a:t>12</a:t>
             </a:fld>
             <a:endParaRPr lang="en-US" dirty="0"/>
           </a:p>
@@ -7337,6 +6871,472 @@
     <p:extLst>
       <p:ext uri="{BB962C8B-B14F-4D97-AF65-F5344CB8AC3E}">
         <p14:creationId xmlns:p14="http://schemas.microsoft.com/office/powerpoint/2010/main" val="1816502483"/>
+      </p:ext>
+    </p:extLst>
+  </p:cSld>
+  <p:clrMapOvr>
+    <a:masterClrMapping/>
+  </p:clrMapOvr>
+</p:sld>
+</file>
+
+<file path=ppt/slides/slide13.xml><?xml version="1.0" encoding="utf-8"?>
+<p:sld xmlns:a="http://schemas.openxmlformats.org/drawingml/2006/main" xmlns:r="http://schemas.openxmlformats.org/officeDocument/2006/relationships" xmlns:p="http://schemas.openxmlformats.org/presentationml/2006/main">
+  <p:cSld>
+    <p:spTree>
+      <p:nvGrpSpPr>
+        <p:cNvPr id="1" name="">
+          <a:extLst>
+            <a:ext uri="{FF2B5EF4-FFF2-40B4-BE49-F238E27FC236}">
+              <a16:creationId xmlns:a16="http://schemas.microsoft.com/office/drawing/2014/main" id="{8D67D301-B114-F827-4260-924D7C208916}"/>
+            </a:ext>
+          </a:extLst>
+        </p:cNvPr>
+        <p:cNvGrpSpPr/>
+        <p:nvPr/>
+      </p:nvGrpSpPr>
+      <p:grpSpPr>
+        <a:xfrm>
+          <a:off x="0" y="0"/>
+          <a:ext cx="0" cy="0"/>
+          <a:chOff x="0" y="0"/>
+          <a:chExt cx="0" cy="0"/>
+        </a:xfrm>
+      </p:grpSpPr>
+      <p:sp>
+        <p:nvSpPr>
+          <p:cNvPr id="4" name="슬라이드 번호 개체 틀 3">
+            <a:extLst>
+              <a:ext uri="{FF2B5EF4-FFF2-40B4-BE49-F238E27FC236}">
+                <a16:creationId xmlns:a16="http://schemas.microsoft.com/office/drawing/2014/main" id="{445FA5C7-898C-1C68-7E74-AD6760E3C3F3}"/>
+              </a:ext>
+            </a:extLst>
+          </p:cNvPr>
+          <p:cNvSpPr>
+            <a:spLocks noGrp="1"/>
+          </p:cNvSpPr>
+          <p:nvPr>
+            <p:ph type="sldNum" sz="quarter" idx="12"/>
+          </p:nvPr>
+        </p:nvSpPr>
+        <p:spPr>
+          <a:xfrm>
+            <a:off x="10514011" y="6036261"/>
+            <a:ext cx="753545" cy="365125"/>
+          </a:xfrm>
+        </p:spPr>
+        <p:txBody>
+          <a:bodyPr/>
+          <a:lstStyle/>
+          <a:p>
+            <a:fld id="{D57F1E4F-1CFF-5643-939E-217C01CDF565}" type="slidenum">
+              <a:rPr lang="en-US" smtClean="0"/>
+              <a:pPr/>
+              <a:t>13</a:t>
+            </a:fld>
+            <a:endParaRPr lang="en-US" dirty="0"/>
+          </a:p>
+        </p:txBody>
+      </p:sp>
+      <p:sp>
+        <p:nvSpPr>
+          <p:cNvPr id="3" name="제목 1">
+            <a:extLst>
+              <a:ext uri="{FF2B5EF4-FFF2-40B4-BE49-F238E27FC236}">
+                <a16:creationId xmlns:a16="http://schemas.microsoft.com/office/drawing/2014/main" id="{1D8A7BF3-1C90-CC60-888E-27948DFAF53C}"/>
+              </a:ext>
+            </a:extLst>
+          </p:cNvPr>
+          <p:cNvSpPr txBox="1">
+            <a:spLocks/>
+          </p:cNvSpPr>
+          <p:nvPr/>
+        </p:nvSpPr>
+        <p:spPr>
+          <a:xfrm>
+            <a:off x="475645" y="481983"/>
+            <a:ext cx="10353762" cy="766439"/>
+          </a:xfrm>
+          <a:prstGeom prst="rect">
+            <a:avLst/>
+          </a:prstGeom>
+        </p:spPr>
+        <p:txBody>
+          <a:bodyPr vert="horz" lIns="91440" tIns="45720" rIns="91440" bIns="45720" rtlCol="0" anchor="ctr">
+            <a:normAutofit/>
+          </a:bodyPr>
+          <a:lstStyle>
+            <a:lvl1pPr algn="ctr" defTabSz="914400" rtl="0" eaLnBrk="1" latinLnBrk="1" hangingPunct="1">
+              <a:lnSpc>
+                <a:spcPct val="90000"/>
+              </a:lnSpc>
+              <a:spcBef>
+                <a:spcPct val="0"/>
+              </a:spcBef>
+              <a:buNone/>
+              <a:defRPr sz="3200" kern="1200" cap="all" baseline="0">
+                <a:solidFill>
+                  <a:schemeClr val="tx1"/>
+                </a:solidFill>
+                <a:effectLst/>
+                <a:latin typeface="Batang" panose="02030600000101010101" pitchFamily="18" charset="-127"/>
+                <a:ea typeface="Batang" panose="02030600000101010101" pitchFamily="18" charset="-127"/>
+                <a:cs typeface="+mj-cs"/>
+              </a:defRPr>
+            </a:lvl1pPr>
+          </a:lstStyle>
+          <a:p>
+            <a:pPr algn="l"/>
+            <a:r>
+              <a:rPr lang="en-US" altLang="ko-KR" sz="2800" cap="none" dirty="0">
+                <a:latin typeface="D2Coding" panose="020B0609020101020101" pitchFamily="49" charset="-127"/>
+                <a:ea typeface="D2Coding" panose="020B0609020101020101" pitchFamily="49" charset="-127"/>
+                <a:cs typeface="Segoe UI Light" panose="020B0502040204020203" pitchFamily="34" charset="0"/>
+              </a:rPr>
+              <a:t>YOLO</a:t>
+            </a:r>
+            <a:endParaRPr lang="ko-KR" altLang="en-US" sz="2800" cap="none" dirty="0">
+              <a:latin typeface="D2Coding" panose="020B0609020101020101" pitchFamily="49" charset="-127"/>
+              <a:ea typeface="D2Coding" panose="020B0609020101020101" pitchFamily="49" charset="-127"/>
+              <a:cs typeface="Segoe UI Light" panose="020B0502040204020203" pitchFamily="34" charset="0"/>
+            </a:endParaRPr>
+          </a:p>
+        </p:txBody>
+      </p:sp>
+      <p:pic>
+        <p:nvPicPr>
+          <p:cNvPr id="7" name="Picture 2">
+            <a:extLst>
+              <a:ext uri="{FF2B5EF4-FFF2-40B4-BE49-F238E27FC236}">
+                <a16:creationId xmlns:a16="http://schemas.microsoft.com/office/drawing/2014/main" id="{991A9F3B-8F15-60CA-FF37-066CA17F4ACD}"/>
+              </a:ext>
+            </a:extLst>
+          </p:cNvPr>
+          <p:cNvPicPr>
+            <a:picLocks noChangeAspect="1" noChangeArrowheads="1"/>
+          </p:cNvPicPr>
+          <p:nvPr/>
+        </p:nvPicPr>
+        <p:blipFill>
+          <a:blip r:embed="rId2">
+            <a:extLst>
+              <a:ext uri="{28A0092B-C50C-407E-A947-70E740481C1C}">
+                <a14:useLocalDpi xmlns:a14="http://schemas.microsoft.com/office/drawing/2010/main" val="0"/>
+              </a:ext>
+            </a:extLst>
+          </a:blip>
+          <a:srcRect/>
+          <a:stretch>
+            <a:fillRect/>
+          </a:stretch>
+        </p:blipFill>
+        <p:spPr bwMode="auto">
+          <a:xfrm>
+            <a:off x="1728040" y="2178311"/>
+            <a:ext cx="8244635" cy="4126339"/>
+          </a:xfrm>
+          <a:prstGeom prst="rect">
+            <a:avLst/>
+          </a:prstGeom>
+          <a:noFill/>
+          <a:extLst>
+            <a:ext uri="{909E8E84-426E-40DD-AFC4-6F175D3DCCD1}">
+              <a14:hiddenFill xmlns:a14="http://schemas.microsoft.com/office/drawing/2010/main">
+                <a:solidFill>
+                  <a:srgbClr val="FFFFFF"/>
+                </a:solidFill>
+              </a14:hiddenFill>
+            </a:ext>
+          </a:extLst>
+        </p:spPr>
+      </p:pic>
+      <p:sp>
+        <p:nvSpPr>
+          <p:cNvPr id="8" name="TextBox 7">
+            <a:extLst>
+              <a:ext uri="{FF2B5EF4-FFF2-40B4-BE49-F238E27FC236}">
+                <a16:creationId xmlns:a16="http://schemas.microsoft.com/office/drawing/2014/main" id="{F07ADC64-4751-52A0-DDEB-20843A556B71}"/>
+              </a:ext>
+            </a:extLst>
+          </p:cNvPr>
+          <p:cNvSpPr txBox="1"/>
+          <p:nvPr/>
+        </p:nvSpPr>
+        <p:spPr>
+          <a:xfrm>
+            <a:off x="623140" y="1424888"/>
+            <a:ext cx="11159285" cy="369332"/>
+          </a:xfrm>
+          <a:prstGeom prst="rect">
+            <a:avLst/>
+          </a:prstGeom>
+          <a:noFill/>
+        </p:spPr>
+        <p:txBody>
+          <a:bodyPr wrap="square" rtlCol="0">
+            <a:spAutoFit/>
+          </a:bodyPr>
+          <a:lstStyle/>
+          <a:p>
+            <a:r>
+              <a:rPr lang="ko-KR" altLang="en-US" dirty="0">
+                <a:latin typeface="D2Coding" panose="020B0609020101020101" pitchFamily="49" charset="-127"/>
+                <a:ea typeface="D2Coding" panose="020B0609020101020101" pitchFamily="49" charset="-127"/>
+              </a:rPr>
+              <a:t>컴퓨터가 </a:t>
+            </a:r>
+            <a:r>
+              <a:rPr lang="en-US" altLang="ko-KR" dirty="0">
+                <a:latin typeface="D2Coding" panose="020B0609020101020101" pitchFamily="49" charset="-127"/>
+                <a:ea typeface="D2Coding" panose="020B0609020101020101" pitchFamily="49" charset="-127"/>
+              </a:rPr>
+              <a:t>Image</a:t>
+            </a:r>
+            <a:r>
+              <a:rPr lang="ko-KR" altLang="en-US" dirty="0">
+                <a:latin typeface="D2Coding" panose="020B0609020101020101" pitchFamily="49" charset="-127"/>
+                <a:ea typeface="D2Coding" panose="020B0609020101020101" pitchFamily="49" charset="-127"/>
+              </a:rPr>
+              <a:t>의 물체를 감지하고 분류 예측</a:t>
+            </a:r>
+            <a:r>
+              <a:rPr lang="en-US" altLang="ko-KR" dirty="0">
+                <a:latin typeface="D2Coding" panose="020B0609020101020101" pitchFamily="49" charset="-127"/>
+                <a:ea typeface="D2Coding" panose="020B0609020101020101" pitchFamily="49" charset="-127"/>
+              </a:rPr>
+              <a:t>(Object Detection)</a:t>
+            </a:r>
+            <a:r>
+              <a:rPr lang="ko-KR" altLang="en-US" dirty="0">
+                <a:latin typeface="D2Coding" panose="020B0609020101020101" pitchFamily="49" charset="-127"/>
+                <a:ea typeface="D2Coding" panose="020B0609020101020101" pitchFamily="49" charset="-127"/>
+              </a:rPr>
+              <a:t> </a:t>
+            </a:r>
+            <a:r>
+              <a:rPr lang="en-US" altLang="ko-KR" dirty="0">
+                <a:latin typeface="D2Coding" panose="020B0609020101020101" pitchFamily="49" charset="-127"/>
+                <a:ea typeface="D2Coding" panose="020B0609020101020101" pitchFamily="49" charset="-127"/>
+              </a:rPr>
+              <a:t>: </a:t>
+            </a:r>
+            <a:r>
+              <a:rPr lang="en-US" altLang="ko-KR" dirty="0">
+                <a:latin typeface="D2Coding" panose="020B0609020101020101" pitchFamily="49" charset="-127"/>
+                <a:ea typeface="D2Coding" panose="020B0609020101020101" pitchFamily="49" charset="-127"/>
+                <a:hlinkClick r:id="rId3"/>
+              </a:rPr>
+              <a:t>https://roboflow.com/</a:t>
+            </a:r>
+            <a:r>
+              <a:rPr lang="en-US" altLang="ko-KR" dirty="0">
+                <a:latin typeface="D2Coding" panose="020B0609020101020101" pitchFamily="49" charset="-127"/>
+                <a:ea typeface="D2Coding" panose="020B0609020101020101" pitchFamily="49" charset="-127"/>
+              </a:rPr>
+              <a:t> </a:t>
+            </a:r>
+            <a:r>
+              <a:rPr lang="ko-KR" altLang="en-US" dirty="0">
+                <a:latin typeface="D2Coding" panose="020B0609020101020101" pitchFamily="49" charset="-127"/>
+                <a:ea typeface="D2Coding" panose="020B0609020101020101" pitchFamily="49" charset="-127"/>
+              </a:rPr>
+              <a:t> </a:t>
+            </a:r>
+            <a:endParaRPr lang="ko-KR" altLang="en-US" dirty="0">
+              <a:solidFill>
+                <a:srgbClr val="0070C0"/>
+              </a:solidFill>
+              <a:latin typeface="D2Coding" panose="020B0609020101020101" pitchFamily="49" charset="-127"/>
+              <a:ea typeface="D2Coding" panose="020B0609020101020101" pitchFamily="49" charset="-127"/>
+            </a:endParaRPr>
+          </a:p>
+        </p:txBody>
+      </p:sp>
+    </p:spTree>
+    <p:extLst>
+      <p:ext uri="{BB962C8B-B14F-4D97-AF65-F5344CB8AC3E}">
+        <p14:creationId xmlns:p14="http://schemas.microsoft.com/office/powerpoint/2010/main" val="1798292069"/>
+      </p:ext>
+    </p:extLst>
+  </p:cSld>
+  <p:clrMapOvr>
+    <a:masterClrMapping/>
+  </p:clrMapOvr>
+</p:sld>
+</file>
+
+<file path=ppt/slides/slide14.xml><?xml version="1.0" encoding="utf-8"?>
+<p:sld xmlns:a="http://schemas.openxmlformats.org/drawingml/2006/main" xmlns:r="http://schemas.openxmlformats.org/officeDocument/2006/relationships" xmlns:p="http://schemas.openxmlformats.org/presentationml/2006/main">
+  <p:cSld>
+    <p:spTree>
+      <p:nvGrpSpPr>
+        <p:cNvPr id="1" name="">
+          <a:extLst>
+            <a:ext uri="{FF2B5EF4-FFF2-40B4-BE49-F238E27FC236}">
+              <a16:creationId xmlns:a16="http://schemas.microsoft.com/office/drawing/2014/main" id="{8FB326FB-150E-BE96-08E2-079622462002}"/>
+            </a:ext>
+          </a:extLst>
+        </p:cNvPr>
+        <p:cNvGrpSpPr/>
+        <p:nvPr/>
+      </p:nvGrpSpPr>
+      <p:grpSpPr>
+        <a:xfrm>
+          <a:off x="0" y="0"/>
+          <a:ext cx="0" cy="0"/>
+          <a:chOff x="0" y="0"/>
+          <a:chExt cx="0" cy="0"/>
+        </a:xfrm>
+      </p:grpSpPr>
+      <p:sp>
+        <p:nvSpPr>
+          <p:cNvPr id="4" name="슬라이드 번호 개체 틀 3">
+            <a:extLst>
+              <a:ext uri="{FF2B5EF4-FFF2-40B4-BE49-F238E27FC236}">
+                <a16:creationId xmlns:a16="http://schemas.microsoft.com/office/drawing/2014/main" id="{AF74812A-4AB7-6AC8-E8CF-FBA1128EF365}"/>
+              </a:ext>
+            </a:extLst>
+          </p:cNvPr>
+          <p:cNvSpPr>
+            <a:spLocks noGrp="1"/>
+          </p:cNvSpPr>
+          <p:nvPr>
+            <p:ph type="sldNum" sz="quarter" idx="12"/>
+          </p:nvPr>
+        </p:nvSpPr>
+        <p:spPr>
+          <a:xfrm>
+            <a:off x="10514011" y="6036261"/>
+            <a:ext cx="753545" cy="365125"/>
+          </a:xfrm>
+        </p:spPr>
+        <p:txBody>
+          <a:bodyPr/>
+          <a:lstStyle/>
+          <a:p>
+            <a:fld id="{D57F1E4F-1CFF-5643-939E-217C01CDF565}" type="slidenum">
+              <a:rPr lang="en-US" smtClean="0"/>
+              <a:pPr/>
+              <a:t>14</a:t>
+            </a:fld>
+            <a:endParaRPr lang="en-US" dirty="0"/>
+          </a:p>
+        </p:txBody>
+      </p:sp>
+      <p:sp>
+        <p:nvSpPr>
+          <p:cNvPr id="3" name="제목 1">
+            <a:extLst>
+              <a:ext uri="{FF2B5EF4-FFF2-40B4-BE49-F238E27FC236}">
+                <a16:creationId xmlns:a16="http://schemas.microsoft.com/office/drawing/2014/main" id="{FCBB2FC7-ABBB-6EF3-A901-A983D707DAD0}"/>
+              </a:ext>
+            </a:extLst>
+          </p:cNvPr>
+          <p:cNvSpPr txBox="1">
+            <a:spLocks/>
+          </p:cNvSpPr>
+          <p:nvPr/>
+        </p:nvSpPr>
+        <p:spPr>
+          <a:xfrm>
+            <a:off x="475645" y="481983"/>
+            <a:ext cx="10353762" cy="766439"/>
+          </a:xfrm>
+          <a:prstGeom prst="rect">
+            <a:avLst/>
+          </a:prstGeom>
+        </p:spPr>
+        <p:txBody>
+          <a:bodyPr vert="horz" lIns="91440" tIns="45720" rIns="91440" bIns="45720" rtlCol="0" anchor="ctr">
+            <a:normAutofit/>
+          </a:bodyPr>
+          <a:lstStyle>
+            <a:lvl1pPr algn="ctr" defTabSz="914400" rtl="0" eaLnBrk="1" latinLnBrk="1" hangingPunct="1">
+              <a:lnSpc>
+                <a:spcPct val="90000"/>
+              </a:lnSpc>
+              <a:spcBef>
+                <a:spcPct val="0"/>
+              </a:spcBef>
+              <a:buNone/>
+              <a:defRPr sz="3200" kern="1200" cap="all" baseline="0">
+                <a:solidFill>
+                  <a:schemeClr val="tx1"/>
+                </a:solidFill>
+                <a:effectLst/>
+                <a:latin typeface="Batang" panose="02030600000101010101" pitchFamily="18" charset="-127"/>
+                <a:ea typeface="Batang" panose="02030600000101010101" pitchFamily="18" charset="-127"/>
+                <a:cs typeface="+mj-cs"/>
+              </a:defRPr>
+            </a:lvl1pPr>
+          </a:lstStyle>
+          <a:p>
+            <a:pPr algn="l"/>
+            <a:r>
+              <a:rPr lang="en-US" altLang="ko-KR" sz="2800" cap="none" dirty="0">
+                <a:latin typeface="D2Coding" panose="020B0609020101020101" pitchFamily="49" charset="-127"/>
+                <a:ea typeface="D2Coding" panose="020B0609020101020101" pitchFamily="49" charset="-127"/>
+                <a:cs typeface="Segoe UI Light" panose="020B0502040204020203" pitchFamily="34" charset="0"/>
+              </a:rPr>
+              <a:t>YOLO: </a:t>
+            </a:r>
+            <a:r>
+              <a:rPr lang="en-US" altLang="ko-KR" sz="2800" cap="none" dirty="0">
+                <a:latin typeface="D2Coding" panose="020B0609020101020101" pitchFamily="49" charset="-127"/>
+                <a:ea typeface="D2Coding" panose="020B0609020101020101" pitchFamily="49" charset="-127"/>
+                <a:cs typeface="Segoe UI Light" panose="020B0502040204020203" pitchFamily="34" charset="0"/>
+                <a:hlinkClick r:id="rId2">
+                  <a:extLst>
+                    <a:ext uri="{A12FA001-AC4F-418D-AE19-62706E023703}">
+                      <ahyp:hlinkClr xmlns:ahyp="http://schemas.microsoft.com/office/drawing/2018/hyperlinkcolor" val="tx"/>
+                    </a:ext>
+                  </a:extLst>
+                </a:hlinkClick>
+              </a:rPr>
+              <a:t>YOLO Object Detection</a:t>
+            </a:r>
+            <a:endParaRPr lang="ko-KR" altLang="en-US" sz="2800" cap="none" dirty="0">
+              <a:latin typeface="D2Coding" panose="020B0609020101020101" pitchFamily="49" charset="-127"/>
+              <a:ea typeface="D2Coding" panose="020B0609020101020101" pitchFamily="49" charset="-127"/>
+              <a:cs typeface="Segoe UI Light" panose="020B0502040204020203" pitchFamily="34" charset="0"/>
+            </a:endParaRPr>
+          </a:p>
+        </p:txBody>
+      </p:sp>
+      <p:pic>
+        <p:nvPicPr>
+          <p:cNvPr id="17" name="그림 16">
+            <a:extLst>
+              <a:ext uri="{FF2B5EF4-FFF2-40B4-BE49-F238E27FC236}">
+                <a16:creationId xmlns:a16="http://schemas.microsoft.com/office/drawing/2014/main" id="{AE399E9D-0E06-6644-28CE-43E6B82352B6}"/>
+              </a:ext>
+            </a:extLst>
+          </p:cNvPr>
+          <p:cNvPicPr>
+            <a:picLocks noChangeAspect="1"/>
+          </p:cNvPicPr>
+          <p:nvPr/>
+        </p:nvPicPr>
+        <p:blipFill>
+          <a:blip r:embed="rId3"/>
+          <a:stretch>
+            <a:fillRect/>
+          </a:stretch>
+        </p:blipFill>
+        <p:spPr>
+          <a:xfrm>
+            <a:off x="1268356" y="1685745"/>
+            <a:ext cx="9600234" cy="4562655"/>
+          </a:xfrm>
+          <a:prstGeom prst="rect">
+            <a:avLst/>
+          </a:prstGeom>
+        </p:spPr>
+      </p:pic>
+    </p:spTree>
+    <p:extLst>
+      <p:ext uri="{BB962C8B-B14F-4D97-AF65-F5344CB8AC3E}">
+        <p14:creationId xmlns:p14="http://schemas.microsoft.com/office/powerpoint/2010/main" val="1478085054"/>
       </p:ext>
     </p:extLst>
   </p:cSld>
